--- a/docs/onboarding/pptx/02-admin.pptx
+++ b/docs/onboarding/pptx/02-admin.pptx
@@ -3446,7 +3446,7 @@
         <p:spPr>
           <a:xfrm>
             <a:off x="841248" y="1353312"/>
-            <a:ext cx="10509199" cy="868680"/>
+            <a:ext cx="5120640" cy="1280160"/>
           </a:xfrm>
           <a:prstGeom prst="rect">
             <a:avLst/>
@@ -3460,7 +3460,7 @@
           <a:lstStyle/>
           <a:p>
             <a:r>
-              <a:rPr sz="3000" b="1" spc="-40">
+              <a:rPr sz="2700" b="1" spc="-40">
                 <a:solidFill>
                   <a:srgbClr val="0A0A0A"/>
                 </a:solidFill>
@@ -3479,8 +3479,8 @@
         </p:nvSpPr>
         <p:spPr>
           <a:xfrm>
-            <a:off x="841248" y="2194560"/>
-            <a:ext cx="9601200" cy="822960"/>
+            <a:off x="841248" y="2414016"/>
+            <a:ext cx="5120640" cy="1097280"/>
           </a:xfrm>
           <a:prstGeom prst="rect">
             <a:avLst/>
@@ -3495,11 +3495,11 @@
           <a:p>
             <a:pPr>
               <a:lnSpc>
-                <a:spcPct val="135000"/>
+                <a:spcPct val="130000"/>
               </a:lnSpc>
             </a:pPr>
             <a:r>
-              <a:rPr sz="1400" b="0">
+              <a:rPr sz="1300" b="0">
                 <a:solidFill>
                   <a:srgbClr val="52525B"/>
                 </a:solidFill>
@@ -3518,8 +3518,8 @@
         </p:nvSpPr>
         <p:spPr>
           <a:xfrm>
-            <a:off x="841248" y="2651760"/>
-            <a:ext cx="10509199" cy="566928"/>
+            <a:off x="841248" y="3108960"/>
+            <a:ext cx="5120640" cy="713232"/>
           </a:xfrm>
           <a:prstGeom prst="rect">
             <a:avLst/>
@@ -3532,8 +3532,13 @@
           </a:bodyPr>
           <a:lstStyle/>
           <a:p>
-            <a:r>
-              <a:rPr sz="1450" b="1">
+            <a:pPr>
+              <a:lnSpc>
+                <a:spcPct val="125000"/>
+              </a:lnSpc>
+            </a:pPr>
+            <a:r>
+              <a:rPr sz="1300" b="1">
                 <a:solidFill>
                   <a:srgbClr val="0A0A0A"/>
                 </a:solidFill>
@@ -3542,7 +3547,7 @@
               <a:t>Banco y cuenta:  </a:t>
             </a:r>
             <a:r>
-              <a:rPr sz="1450" b="0">
+              <a:rPr sz="1300" b="0">
                 <a:solidFill>
                   <a:srgbClr val="52525B"/>
                 </a:solidFill>
@@ -3555,23 +3560,171 @@
       </p:sp>
       <p:sp>
         <p:nvSpPr>
-          <p:cNvPr id="7" name="Rectangle 6"/>
+          <p:cNvPr id="7" name="TextBox 6"/>
+          <p:cNvSpPr txBox="1"/>
+          <p:nvPr/>
+        </p:nvSpPr>
+        <p:spPr>
+          <a:xfrm>
+            <a:off x="841248" y="3822192"/>
+            <a:ext cx="5120640" cy="713232"/>
+          </a:xfrm>
+          <a:prstGeom prst="rect">
+            <a:avLst/>
+          </a:prstGeom>
+          <a:noFill/>
+        </p:spPr>
+        <p:txBody>
+          <a:bodyPr wrap="square" anchor="ctr" lIns="0" rIns="0" tIns="0" bIns="0">
+            <a:spAutoFit/>
+          </a:bodyPr>
+          <a:lstStyle/>
+          <a:p>
+            <a:pPr>
+              <a:lnSpc>
+                <a:spcPct val="125000"/>
+              </a:lnSpc>
+            </a:pPr>
+            <a:r>
+              <a:rPr sz="1300" b="1">
+                <a:solidFill>
+                  <a:srgbClr val="0A0A0A"/>
+                </a:solidFill>
+                <a:latin typeface="Calibri"/>
+              </a:rPr>
+              <a:t>Seña:  </a:t>
+            </a:r>
+            <a:r>
+              <a:rPr sz="1300" b="0">
+                <a:solidFill>
+                  <a:srgbClr val="52525B"/>
+                </a:solidFill>
+                <a:latin typeface="Calibri"/>
+              </a:rPr>
+              <a:t>porcentaje del valor (por defecto 10%) y plazo en horas para pagar.</a:t>
+            </a:r>
+          </a:p>
+        </p:txBody>
+      </p:sp>
+      <p:sp>
+        <p:nvSpPr>
+          <p:cNvPr id="8" name="TextBox 7"/>
+          <p:cNvSpPr txBox="1"/>
+          <p:nvPr/>
+        </p:nvSpPr>
+        <p:spPr>
+          <a:xfrm>
+            <a:off x="841248" y="4535424"/>
+            <a:ext cx="5120640" cy="713232"/>
+          </a:xfrm>
+          <a:prstGeom prst="rect">
+            <a:avLst/>
+          </a:prstGeom>
+          <a:noFill/>
+        </p:spPr>
+        <p:txBody>
+          <a:bodyPr wrap="square" anchor="ctr" lIns="0" rIns="0" tIns="0" bIns="0">
+            <a:spAutoFit/>
+          </a:bodyPr>
+          <a:lstStyle/>
+          <a:p>
+            <a:pPr>
+              <a:lnSpc>
+                <a:spcPct val="125000"/>
+              </a:lnSpc>
+            </a:pPr>
+            <a:r>
+              <a:rPr sz="1300" b="1">
+                <a:solidFill>
+                  <a:srgbClr val="0A0A0A"/>
+                </a:solidFill>
+                <a:latin typeface="Calibri"/>
+              </a:rPr>
+              <a:t>Instrucciones:  </a:t>
+            </a:r>
+            <a:r>
+              <a:rPr sz="1300" b="0">
+                <a:solidFill>
+                  <a:srgbClr val="52525B"/>
+                </a:solidFill>
+                <a:latin typeface="Calibri"/>
+              </a:rPr>
+              <a:t>texto que guía al comprador, en español e inglés.</a:t>
+            </a:r>
+          </a:p>
+        </p:txBody>
+      </p:sp>
+      <p:sp>
+        <p:nvSpPr>
+          <p:cNvPr id="9" name="TextBox 8"/>
+          <p:cNvSpPr txBox="1"/>
+          <p:nvPr/>
+        </p:nvSpPr>
+        <p:spPr>
+          <a:xfrm>
+            <a:off x="841248" y="5248656"/>
+            <a:ext cx="5120640" cy="713232"/>
+          </a:xfrm>
+          <a:prstGeom prst="rect">
+            <a:avLst/>
+          </a:prstGeom>
+          <a:noFill/>
+        </p:spPr>
+        <p:txBody>
+          <a:bodyPr wrap="square" anchor="ctr" lIns="0" rIns="0" tIns="0" bIns="0">
+            <a:spAutoFit/>
+          </a:bodyPr>
+          <a:lstStyle/>
+          <a:p>
+            <a:pPr>
+              <a:lnSpc>
+                <a:spcPct val="125000"/>
+              </a:lnSpc>
+            </a:pPr>
+            <a:r>
+              <a:rPr sz="1300" b="1">
+                <a:solidFill>
+                  <a:srgbClr val="0A0A0A"/>
+                </a:solidFill>
+                <a:latin typeface="Calibri"/>
+              </a:rPr>
+              <a:t>Contacto:  </a:t>
+            </a:r>
+            <a:r>
+              <a:rPr sz="1300" b="0">
+                <a:solidFill>
+                  <a:srgbClr val="52525B"/>
+                </a:solidFill>
+                <a:latin typeface="Calibri"/>
+              </a:rPr>
+              <a:t>email y teléfono para dudas de pago.</a:t>
+            </a:r>
+          </a:p>
+        </p:txBody>
+      </p:sp>
+      <p:sp>
+        <p:nvSpPr>
+          <p:cNvPr id="10" name="Rounded Rectangle 9"/>
           <p:cNvSpPr/>
           <p:nvPr/>
         </p:nvSpPr>
         <p:spPr>
           <a:xfrm>
-            <a:off x="841248" y="3217788"/>
-            <a:ext cx="10509199" cy="900"/>
-          </a:xfrm>
-          <a:prstGeom prst="rect">
-            <a:avLst/>
+            <a:off x="6419088" y="932688"/>
+            <a:ext cx="4931359" cy="5010912"/>
+          </a:xfrm>
+          <a:prstGeom prst="roundRect">
+            <a:avLst>
+              <a:gd name="adj" fmla="val 4000"/>
+            </a:avLst>
           </a:prstGeom>
           <a:solidFill>
-            <a:srgbClr val="E4E4E7"/>
+            <a:srgbClr val="F1F1F3"/>
           </a:solidFill>
-          <a:ln>
-            <a:noFill/>
+          <a:ln w="12700">
+            <a:solidFill>
+              <a:srgbClr val="A1A1AA"/>
+            </a:solidFill>
           </a:ln>
           <a:effectLst/>
         </p:spPr>
@@ -3590,277 +3743,37 @@
           </a:fontRef>
         </p:style>
         <p:txBody>
-          <a:bodyPr rtlCol="0" anchor="ctr"/>
+          <a:bodyPr rtlCol="0" anchor="ctr" wrap="square"/>
           <a:lstStyle/>
           <a:p>
             <a:pPr algn="ctr"/>
-          </a:p>
-        </p:txBody>
-      </p:sp>
-      <p:sp>
-        <p:nvSpPr>
-          <p:cNvPr id="8" name="TextBox 7"/>
-          <p:cNvSpPr txBox="1"/>
-          <p:nvPr/>
-        </p:nvSpPr>
-        <p:spPr>
-          <a:xfrm>
-            <a:off x="841248" y="3218688"/>
-            <a:ext cx="10509199" cy="566928"/>
-          </a:xfrm>
-          <a:prstGeom prst="rect">
-            <a:avLst/>
-          </a:prstGeom>
-          <a:noFill/>
-        </p:spPr>
-        <p:txBody>
-          <a:bodyPr wrap="square" anchor="ctr" lIns="0" rIns="0" tIns="0" bIns="0">
-            <a:spAutoFit/>
-          </a:bodyPr>
-          <a:lstStyle/>
-          <a:p>
-            <a:r>
-              <a:rPr sz="1450" b="1">
-                <a:solidFill>
-                  <a:srgbClr val="0A0A0A"/>
-                </a:solidFill>
-                <a:latin typeface="Calibri"/>
-              </a:rPr>
-              <a:t>Seña:  </a:t>
-            </a:r>
-            <a:r>
-              <a:rPr sz="1450" b="0">
-                <a:solidFill>
-                  <a:srgbClr val="52525B"/>
-                </a:solidFill>
-                <a:latin typeface="Calibri"/>
-              </a:rPr>
-              <a:t>porcentaje del valor (por defecto 10%) y plazo en horas para pagar.</a:t>
-            </a:r>
-          </a:p>
-        </p:txBody>
-      </p:sp>
-      <p:sp>
-        <p:nvSpPr>
-          <p:cNvPr id="9" name="Rectangle 8"/>
-          <p:cNvSpPr/>
-          <p:nvPr/>
-        </p:nvSpPr>
-        <p:spPr>
-          <a:xfrm>
-            <a:off x="841248" y="3784716"/>
-            <a:ext cx="10509199" cy="900"/>
-          </a:xfrm>
-          <a:prstGeom prst="rect">
-            <a:avLst/>
-          </a:prstGeom>
-          <a:solidFill>
-            <a:srgbClr val="E4E4E7"/>
-          </a:solidFill>
-          <a:ln>
-            <a:noFill/>
-          </a:ln>
-          <a:effectLst/>
-        </p:spPr>
-        <p:style>
-          <a:lnRef idx="1">
-            <a:schemeClr val="accent1"/>
-          </a:lnRef>
-          <a:fillRef idx="3">
-            <a:schemeClr val="accent1"/>
-          </a:fillRef>
-          <a:effectRef idx="2">
-            <a:schemeClr val="accent1"/>
-          </a:effectRef>
-          <a:fontRef idx="minor">
-            <a:schemeClr val="lt1"/>
-          </a:fontRef>
-        </p:style>
-        <p:txBody>
-          <a:bodyPr rtlCol="0" anchor="ctr"/>
-          <a:lstStyle/>
+            <a:r>
+              <a:rPr sz="1200" b="1" spc="120">
+                <a:solidFill>
+                  <a:srgbClr val="71717A"/>
+                </a:solidFill>
+                <a:latin typeface="Calibri"/>
+              </a:rPr>
+              <a:t>CAPTURA PENDIENTE</a:t>
+            </a:r>
+          </a:p>
           <a:p>
             <a:pPr algn="ctr"/>
-          </a:p>
-        </p:txBody>
-      </p:sp>
-      <p:sp>
-        <p:nvSpPr>
-          <p:cNvPr id="10" name="TextBox 9"/>
-          <p:cNvSpPr txBox="1"/>
-          <p:nvPr/>
-        </p:nvSpPr>
-        <p:spPr>
-          <a:xfrm>
-            <a:off x="841248" y="3785616"/>
-            <a:ext cx="10509199" cy="566928"/>
-          </a:xfrm>
-          <a:prstGeom prst="rect">
-            <a:avLst/>
-          </a:prstGeom>
-          <a:noFill/>
-        </p:spPr>
-        <p:txBody>
-          <a:bodyPr wrap="square" anchor="ctr" lIns="0" rIns="0" tIns="0" bIns="0">
-            <a:spAutoFit/>
-          </a:bodyPr>
-          <a:lstStyle/>
-          <a:p>
-            <a:r>
-              <a:rPr sz="1450" b="1">
-                <a:solidFill>
-                  <a:srgbClr val="0A0A0A"/>
-                </a:solidFill>
-                <a:latin typeface="Calibri"/>
-              </a:rPr>
-              <a:t>Instrucciones:  </a:t>
-            </a:r>
-            <a:r>
-              <a:rPr sz="1450" b="0">
-                <a:solidFill>
-                  <a:srgbClr val="52525B"/>
-                </a:solidFill>
-                <a:latin typeface="Calibri"/>
-              </a:rPr>
-              <a:t>texto que guía al comprador, en español e inglés.</a:t>
-            </a:r>
-          </a:p>
-        </p:txBody>
-      </p:sp>
-      <p:sp>
-        <p:nvSpPr>
-          <p:cNvPr id="11" name="Rectangle 10"/>
-          <p:cNvSpPr/>
-          <p:nvPr/>
-        </p:nvSpPr>
-        <p:spPr>
-          <a:xfrm>
-            <a:off x="841248" y="4351644"/>
-            <a:ext cx="10509199" cy="900"/>
-          </a:xfrm>
-          <a:prstGeom prst="rect">
-            <a:avLst/>
-          </a:prstGeom>
-          <a:solidFill>
-            <a:srgbClr val="E4E4E7"/>
-          </a:solidFill>
-          <a:ln>
-            <a:noFill/>
-          </a:ln>
-          <a:effectLst/>
-        </p:spPr>
-        <p:style>
-          <a:lnRef idx="1">
-            <a:schemeClr val="accent1"/>
-          </a:lnRef>
-          <a:fillRef idx="3">
-            <a:schemeClr val="accent1"/>
-          </a:fillRef>
-          <a:effectRef idx="2">
-            <a:schemeClr val="accent1"/>
-          </a:effectRef>
-          <a:fontRef idx="minor">
-            <a:schemeClr val="lt1"/>
-          </a:fontRef>
-        </p:style>
-        <p:txBody>
-          <a:bodyPr rtlCol="0" anchor="ctr"/>
-          <a:lstStyle/>
-          <a:p>
-            <a:pPr algn="ctr"/>
-          </a:p>
-        </p:txBody>
-      </p:sp>
-      <p:sp>
-        <p:nvSpPr>
-          <p:cNvPr id="12" name="TextBox 11"/>
-          <p:cNvSpPr txBox="1"/>
-          <p:nvPr/>
-        </p:nvSpPr>
-        <p:spPr>
-          <a:xfrm>
-            <a:off x="841248" y="4352544"/>
-            <a:ext cx="10509199" cy="566928"/>
-          </a:xfrm>
-          <a:prstGeom prst="rect">
-            <a:avLst/>
-          </a:prstGeom>
-          <a:noFill/>
-        </p:spPr>
-        <p:txBody>
-          <a:bodyPr wrap="square" anchor="ctr" lIns="0" rIns="0" tIns="0" bIns="0">
-            <a:spAutoFit/>
-          </a:bodyPr>
-          <a:lstStyle/>
-          <a:p>
-            <a:r>
-              <a:rPr sz="1450" b="1">
-                <a:solidFill>
-                  <a:srgbClr val="0A0A0A"/>
-                </a:solidFill>
-                <a:latin typeface="Calibri"/>
-              </a:rPr>
-              <a:t>Contacto:  </a:t>
-            </a:r>
-            <a:r>
-              <a:rPr sz="1450" b="0">
-                <a:solidFill>
-                  <a:srgbClr val="52525B"/>
-                </a:solidFill>
-                <a:latin typeface="Calibri"/>
-              </a:rPr>
-              <a:t>email y teléfono para dudas de pago.</a:t>
-            </a:r>
-          </a:p>
-        </p:txBody>
-      </p:sp>
-      <p:sp>
-        <p:nvSpPr>
-          <p:cNvPr id="13" name="Rectangle 12"/>
-          <p:cNvSpPr/>
-          <p:nvPr/>
-        </p:nvSpPr>
-        <p:spPr>
-          <a:xfrm>
-            <a:off x="841248" y="4918572"/>
-            <a:ext cx="10509199" cy="900"/>
-          </a:xfrm>
-          <a:prstGeom prst="rect">
-            <a:avLst/>
-          </a:prstGeom>
-          <a:solidFill>
-            <a:srgbClr val="E4E4E7"/>
-          </a:solidFill>
-          <a:ln>
-            <a:noFill/>
-          </a:ln>
-          <a:effectLst/>
-        </p:spPr>
-        <p:style>
-          <a:lnRef idx="1">
-            <a:schemeClr val="accent1"/>
-          </a:lnRef>
-          <a:fillRef idx="3">
-            <a:schemeClr val="accent1"/>
-          </a:fillRef>
-          <a:effectRef idx="2">
-            <a:schemeClr val="accent1"/>
-          </a:effectRef>
-          <a:fontRef idx="minor">
-            <a:schemeClr val="lt1"/>
-          </a:fontRef>
-        </p:style>
-        <p:txBody>
-          <a:bodyPr rtlCol="0" anchor="ctr"/>
-          <a:lstStyle/>
-          <a:p>
-            <a:pPr algn="ctr"/>
+            <a:r>
+              <a:rPr sz="1050" b="0">
+                <a:solidFill>
+                  <a:srgbClr val="A1A1AA"/>
+                </a:solidFill>
+                <a:latin typeface="Calibri"/>
+              </a:rPr>
+              <a:t>Configuración · sección Pagos</a:t>
+            </a:r>
           </a:p>
         </p:txBody>
       </p:sp>
       <p:pic>
         <p:nvPicPr>
-          <p:cNvPr id="14" name="Picture 13" descr="renew-wordmark-black.png"/>
+          <p:cNvPr id="11" name="Picture 10" descr="renew-wordmark-black.png"/>
           <p:cNvPicPr>
             <a:picLocks noChangeAspect="1"/>
           </p:cNvPicPr>
@@ -3884,7 +3797,7 @@
       </p:pic>
       <p:sp>
         <p:nvSpPr>
-          <p:cNvPr id="15" name="TextBox 14"/>
+          <p:cNvPr id="12" name="TextBox 11"/>
           <p:cNvSpPr txBox="1"/>
           <p:nvPr/>
         </p:nvSpPr>
@@ -6744,7 +6657,7 @@
         <p:spPr>
           <a:xfrm>
             <a:off x="841248" y="1353312"/>
-            <a:ext cx="10509199" cy="868680"/>
+            <a:ext cx="5120640" cy="1280160"/>
           </a:xfrm>
           <a:prstGeom prst="rect">
             <a:avLst/>
@@ -6758,7 +6671,7 @@
           <a:lstStyle/>
           <a:p>
             <a:r>
-              <a:rPr sz="3000" b="1" spc="-40">
+              <a:rPr sz="2700" b="1" spc="-40">
                 <a:solidFill>
                   <a:srgbClr val="0A0A0A"/>
                 </a:solidFill>
@@ -6777,8 +6690,8 @@
         </p:nvSpPr>
         <p:spPr>
           <a:xfrm>
-            <a:off x="841248" y="2194560"/>
-            <a:ext cx="9601200" cy="822960"/>
+            <a:off x="841248" y="1938528"/>
+            <a:ext cx="5120640" cy="1097280"/>
           </a:xfrm>
           <a:prstGeom prst="rect">
             <a:avLst/>
@@ -6793,11 +6706,11 @@
           <a:p>
             <a:pPr>
               <a:lnSpc>
-                <a:spcPct val="135000"/>
+                <a:spcPct val="130000"/>
               </a:lnSpc>
             </a:pPr>
             <a:r>
-              <a:rPr sz="1400" b="0">
+              <a:rPr sz="1300" b="0">
                 <a:solidFill>
                   <a:srgbClr val="52525B"/>
                 </a:solidFill>
@@ -6816,8 +6729,8 @@
         </p:nvSpPr>
         <p:spPr>
           <a:xfrm>
-            <a:off x="841248" y="2651760"/>
-            <a:ext cx="457200" cy="457200"/>
+            <a:off x="841248" y="2633472"/>
+            <a:ext cx="402336" cy="402336"/>
           </a:xfrm>
           <a:prstGeom prst="ellipse">
             <a:avLst/>
@@ -6850,7 +6763,7 @@
           <a:p>
             <a:pPr algn="ctr"/>
             <a:r>
-              <a:rPr sz="1500" b="1">
+              <a:rPr sz="1300" b="1">
                 <a:solidFill>
                   <a:srgbClr val="FFFFFF"/>
                 </a:solidFill>
@@ -6869,8 +6782,8 @@
         </p:nvSpPr>
         <p:spPr>
           <a:xfrm>
-            <a:off x="1554480" y="2633472"/>
-            <a:ext cx="9795967" cy="845820"/>
+            <a:off x="1463040" y="2615184"/>
+            <a:ext cx="4498848" cy="850392"/>
           </a:xfrm>
           <a:prstGeom prst="rect">
             <a:avLst/>
@@ -6884,7 +6797,7 @@
           <a:lstStyle/>
           <a:p>
             <a:r>
-              <a:rPr sz="1500" b="1">
+              <a:rPr sz="1350" b="1">
                 <a:solidFill>
                   <a:srgbClr val="0A0A0A"/>
                 </a:solidFill>
@@ -6896,11 +6809,11 @@
           <a:p>
             <a:pPr>
               <a:lnSpc>
-                <a:spcPct val="128000"/>
+                <a:spcPct val="125000"/>
               </a:lnSpc>
             </a:pPr>
             <a:r>
-              <a:rPr sz="1250" b="0">
+              <a:rPr sz="1100" b="0">
                 <a:solidFill>
                   <a:srgbClr val="52525B"/>
                 </a:solidFill>
@@ -6919,8 +6832,8 @@
         </p:nvSpPr>
         <p:spPr>
           <a:xfrm>
-            <a:off x="841248" y="3497580"/>
-            <a:ext cx="457200" cy="457200"/>
+            <a:off x="841248" y="3483864"/>
+            <a:ext cx="402336" cy="402336"/>
           </a:xfrm>
           <a:prstGeom prst="ellipse">
             <a:avLst/>
@@ -6953,7 +6866,7 @@
           <a:p>
             <a:pPr algn="ctr"/>
             <a:r>
-              <a:rPr sz="1500" b="1">
+              <a:rPr sz="1300" b="1">
                 <a:solidFill>
                   <a:srgbClr val="FFFFFF"/>
                 </a:solidFill>
@@ -6972,8 +6885,8 @@
         </p:nvSpPr>
         <p:spPr>
           <a:xfrm>
-            <a:off x="1554480" y="3479292"/>
-            <a:ext cx="9795967" cy="845820"/>
+            <a:off x="1463040" y="3465576"/>
+            <a:ext cx="4498848" cy="850392"/>
           </a:xfrm>
           <a:prstGeom prst="rect">
             <a:avLst/>
@@ -6987,7 +6900,7 @@
           <a:lstStyle/>
           <a:p>
             <a:r>
-              <a:rPr sz="1500" b="1">
+              <a:rPr sz="1350" b="1">
                 <a:solidFill>
                   <a:srgbClr val="0A0A0A"/>
                 </a:solidFill>
@@ -6999,11 +6912,11 @@
           <a:p>
             <a:pPr>
               <a:lnSpc>
-                <a:spcPct val="128000"/>
+                <a:spcPct val="125000"/>
               </a:lnSpc>
             </a:pPr>
             <a:r>
-              <a:rPr sz="1250" b="0">
+              <a:rPr sz="1100" b="0">
                 <a:solidFill>
                   <a:srgbClr val="52525B"/>
                 </a:solidFill>
@@ -7022,8 +6935,8 @@
         </p:nvSpPr>
         <p:spPr>
           <a:xfrm>
-            <a:off x="841248" y="4343400"/>
-            <a:ext cx="457200" cy="457200"/>
+            <a:off x="841248" y="4334256"/>
+            <a:ext cx="402336" cy="402336"/>
           </a:xfrm>
           <a:prstGeom prst="ellipse">
             <a:avLst/>
@@ -7056,7 +6969,7 @@
           <a:p>
             <a:pPr algn="ctr"/>
             <a:r>
-              <a:rPr sz="1500" b="1">
+              <a:rPr sz="1300" b="1">
                 <a:solidFill>
                   <a:srgbClr val="FFFFFF"/>
                 </a:solidFill>
@@ -7075,8 +6988,8 @@
         </p:nvSpPr>
         <p:spPr>
           <a:xfrm>
-            <a:off x="1554480" y="4325112"/>
-            <a:ext cx="9795967" cy="845820"/>
+            <a:off x="1463040" y="4315968"/>
+            <a:ext cx="4498848" cy="850392"/>
           </a:xfrm>
           <a:prstGeom prst="rect">
             <a:avLst/>
@@ -7090,7 +7003,7 @@
           <a:lstStyle/>
           <a:p>
             <a:r>
-              <a:rPr sz="1500" b="1">
+              <a:rPr sz="1350" b="1">
                 <a:solidFill>
                   <a:srgbClr val="0A0A0A"/>
                 </a:solidFill>
@@ -7102,11 +7015,11 @@
           <a:p>
             <a:pPr>
               <a:lnSpc>
-                <a:spcPct val="128000"/>
+                <a:spcPct val="125000"/>
               </a:lnSpc>
             </a:pPr>
             <a:r>
-              <a:rPr sz="1250" b="0">
+              <a:rPr sz="1100" b="0">
                 <a:solidFill>
                   <a:srgbClr val="52525B"/>
                 </a:solidFill>
@@ -7125,8 +7038,8 @@
         </p:nvSpPr>
         <p:spPr>
           <a:xfrm>
-            <a:off x="841248" y="5189220"/>
-            <a:ext cx="457200" cy="457200"/>
+            <a:off x="841248" y="5184648"/>
+            <a:ext cx="402336" cy="402336"/>
           </a:xfrm>
           <a:prstGeom prst="ellipse">
             <a:avLst/>
@@ -7159,7 +7072,7 @@
           <a:p>
             <a:pPr algn="ctr"/>
             <a:r>
-              <a:rPr sz="1500" b="1">
+              <a:rPr sz="1300" b="1">
                 <a:solidFill>
                   <a:srgbClr val="FFFFFF"/>
                 </a:solidFill>
@@ -7178,8 +7091,8 @@
         </p:nvSpPr>
         <p:spPr>
           <a:xfrm>
-            <a:off x="1554480" y="5170932"/>
-            <a:ext cx="9795967" cy="845820"/>
+            <a:off x="1463040" y="5166360"/>
+            <a:ext cx="4498848" cy="850392"/>
           </a:xfrm>
           <a:prstGeom prst="rect">
             <a:avLst/>
@@ -7193,7 +7106,7 @@
           <a:lstStyle/>
           <a:p>
             <a:r>
-              <a:rPr sz="1500" b="1">
+              <a:rPr sz="1350" b="1">
                 <a:solidFill>
                   <a:srgbClr val="0A0A0A"/>
                 </a:solidFill>
@@ -7205,24 +7118,93 @@
           <a:p>
             <a:pPr>
               <a:lnSpc>
-                <a:spcPct val="128000"/>
+                <a:spcPct val="125000"/>
               </a:lnSpc>
             </a:pPr>
             <a:r>
-              <a:rPr sz="1250" b="0">
+              <a:rPr sz="1100" b="0">
                 <a:solidFill>
                   <a:srgbClr val="52525B"/>
                 </a:solidFill>
                 <a:latin typeface="Calibri"/>
               </a:rPr>
               <a:t>Se crea la cuenta y se envía un correo de bienvenida con un enlace para que la persona cree su contraseña.</a:t>
+            </a:r>
+          </a:p>
+        </p:txBody>
+      </p:sp>
+      <p:sp>
+        <p:nvSpPr>
+          <p:cNvPr id="14" name="Rounded Rectangle 13"/>
+          <p:cNvSpPr/>
+          <p:nvPr/>
+        </p:nvSpPr>
+        <p:spPr>
+          <a:xfrm>
+            <a:off x="6419088" y="932688"/>
+            <a:ext cx="4931359" cy="5010912"/>
+          </a:xfrm>
+          <a:prstGeom prst="roundRect">
+            <a:avLst>
+              <a:gd name="adj" fmla="val 4000"/>
+            </a:avLst>
+          </a:prstGeom>
+          <a:solidFill>
+            <a:srgbClr val="F1F1F3"/>
+          </a:solidFill>
+          <a:ln w="12700">
+            <a:solidFill>
+              <a:srgbClr val="A1A1AA"/>
+            </a:solidFill>
+          </a:ln>
+          <a:effectLst/>
+        </p:spPr>
+        <p:style>
+          <a:lnRef idx="1">
+            <a:schemeClr val="accent1"/>
+          </a:lnRef>
+          <a:fillRef idx="3">
+            <a:schemeClr val="accent1"/>
+          </a:fillRef>
+          <a:effectRef idx="2">
+            <a:schemeClr val="accent1"/>
+          </a:effectRef>
+          <a:fontRef idx="minor">
+            <a:schemeClr val="lt1"/>
+          </a:fontRef>
+        </p:style>
+        <p:txBody>
+          <a:bodyPr rtlCol="0" anchor="ctr" wrap="square"/>
+          <a:lstStyle/>
+          <a:p>
+            <a:pPr algn="ctr"/>
+            <a:r>
+              <a:rPr sz="1200" b="1" spc="120">
+                <a:solidFill>
+                  <a:srgbClr val="71717A"/>
+                </a:solidFill>
+                <a:latin typeface="Calibri"/>
+              </a:rPr>
+              <a:t>CAPTURA PENDIENTE</a:t>
+            </a:r>
+          </a:p>
+          <a:p>
+            <a:pPr algn="ctr"/>
+            <a:r>
+              <a:rPr sz="1050" b="0">
+                <a:solidFill>
+                  <a:srgbClr val="A1A1AA"/>
+                </a:solidFill>
+                <a:latin typeface="Calibri"/>
+              </a:rPr>
+              <a:t>Formulario «Nuevo usuario»</a:t>
             </a:r>
           </a:p>
         </p:txBody>
       </p:sp>
       <p:pic>
         <p:nvPicPr>
-          <p:cNvPr id="14" name="Picture 13" descr="renew-wordmark-black.png"/>
+          <p:cNvPr id="15" name="Picture 14" descr="renew-wordmark-black.png"/>
           <p:cNvPicPr>
             <a:picLocks noChangeAspect="1"/>
           </p:cNvPicPr>
@@ -7246,7 +7228,7 @@
       </p:pic>
       <p:sp>
         <p:nvSpPr>
-          <p:cNvPr id="15" name="TextBox 14"/>
+          <p:cNvPr id="16" name="TextBox 15"/>
           <p:cNvSpPr txBox="1"/>
           <p:nvPr/>
         </p:nvSpPr>
@@ -8634,7 +8616,7 @@
         <p:spPr>
           <a:xfrm>
             <a:off x="841248" y="1353312"/>
-            <a:ext cx="10509199" cy="868680"/>
+            <a:ext cx="5120640" cy="1280160"/>
           </a:xfrm>
           <a:prstGeom prst="rect">
             <a:avLst/>
@@ -8648,7 +8630,7 @@
           <a:lstStyle/>
           <a:p>
             <a:r>
-              <a:rPr sz="3000" b="1" spc="-40">
+              <a:rPr sz="2700" b="1" spc="-40">
                 <a:solidFill>
                   <a:srgbClr val="0A0A0A"/>
                 </a:solidFill>
@@ -8667,8 +8649,8 @@
         </p:nvSpPr>
         <p:spPr>
           <a:xfrm>
-            <a:off x="841248" y="2194560"/>
-            <a:ext cx="9601200" cy="822960"/>
+            <a:off x="841248" y="2414016"/>
+            <a:ext cx="5120640" cy="1097280"/>
           </a:xfrm>
           <a:prstGeom prst="rect">
             <a:avLst/>
@@ -8683,11 +8665,11 @@
           <a:p>
             <a:pPr>
               <a:lnSpc>
-                <a:spcPct val="135000"/>
+                <a:spcPct val="130000"/>
               </a:lnSpc>
             </a:pPr>
             <a:r>
-              <a:rPr sz="1400" b="0">
+              <a:rPr sz="1300" b="0">
                 <a:solidFill>
                   <a:srgbClr val="52525B"/>
                 </a:solidFill>
@@ -8706,8 +8688,8 @@
         </p:nvSpPr>
         <p:spPr>
           <a:xfrm>
-            <a:off x="841248" y="2651760"/>
-            <a:ext cx="457200" cy="457200"/>
+            <a:off x="841248" y="3108960"/>
+            <a:ext cx="402336" cy="402336"/>
           </a:xfrm>
           <a:prstGeom prst="ellipse">
             <a:avLst/>
@@ -8740,7 +8722,7 @@
           <a:p>
             <a:pPr algn="ctr"/>
             <a:r>
-              <a:rPr sz="1500" b="1">
+              <a:rPr sz="1300" b="1">
                 <a:solidFill>
                   <a:srgbClr val="FFFFFF"/>
                 </a:solidFill>
@@ -8759,8 +8741,8 @@
         </p:nvSpPr>
         <p:spPr>
           <a:xfrm>
-            <a:off x="1554480" y="2633472"/>
-            <a:ext cx="9795967" cy="960120"/>
+            <a:off x="1463040" y="3090672"/>
+            <a:ext cx="4498848" cy="914400"/>
           </a:xfrm>
           <a:prstGeom prst="rect">
             <a:avLst/>
@@ -8774,7 +8756,7 @@
           <a:lstStyle/>
           <a:p>
             <a:r>
-              <a:rPr sz="1500" b="1">
+              <a:rPr sz="1350" b="1">
                 <a:solidFill>
                   <a:srgbClr val="0A0A0A"/>
                 </a:solidFill>
@@ -8786,11 +8768,11 @@
           <a:p>
             <a:pPr>
               <a:lnSpc>
-                <a:spcPct val="128000"/>
+                <a:spcPct val="125000"/>
               </a:lnSpc>
             </a:pPr>
             <a:r>
-              <a:rPr sz="1250" b="0">
+              <a:rPr sz="1100" b="0">
                 <a:solidFill>
                   <a:srgbClr val="52525B"/>
                 </a:solidFill>
@@ -8809,8 +8791,8 @@
         </p:nvSpPr>
         <p:spPr>
           <a:xfrm>
-            <a:off x="841248" y="3611880"/>
-            <a:ext cx="457200" cy="457200"/>
+            <a:off x="841248" y="4023360"/>
+            <a:ext cx="402336" cy="402336"/>
           </a:xfrm>
           <a:prstGeom prst="ellipse">
             <a:avLst/>
@@ -8843,7 +8825,7 @@
           <a:p>
             <a:pPr algn="ctr"/>
             <a:r>
-              <a:rPr sz="1500" b="1">
+              <a:rPr sz="1300" b="1">
                 <a:solidFill>
                   <a:srgbClr val="FFFFFF"/>
                 </a:solidFill>
@@ -8862,8 +8844,8 @@
         </p:nvSpPr>
         <p:spPr>
           <a:xfrm>
-            <a:off x="1554480" y="3593592"/>
-            <a:ext cx="9795967" cy="960120"/>
+            <a:off x="1463040" y="4005072"/>
+            <a:ext cx="4498848" cy="914400"/>
           </a:xfrm>
           <a:prstGeom prst="rect">
             <a:avLst/>
@@ -8877,7 +8859,7 @@
           <a:lstStyle/>
           <a:p>
             <a:r>
-              <a:rPr sz="1500" b="1">
+              <a:rPr sz="1350" b="1">
                 <a:solidFill>
                   <a:srgbClr val="0A0A0A"/>
                 </a:solidFill>
@@ -8889,11 +8871,11 @@
           <a:p>
             <a:pPr>
               <a:lnSpc>
-                <a:spcPct val="128000"/>
+                <a:spcPct val="125000"/>
               </a:lnSpc>
             </a:pPr>
             <a:r>
-              <a:rPr sz="1250" b="0">
+              <a:rPr sz="1100" b="0">
                 <a:solidFill>
                   <a:srgbClr val="52525B"/>
                 </a:solidFill>
@@ -8912,8 +8894,8 @@
         </p:nvSpPr>
         <p:spPr>
           <a:xfrm>
-            <a:off x="841248" y="4572000"/>
-            <a:ext cx="457200" cy="457200"/>
+            <a:off x="841248" y="4937760"/>
+            <a:ext cx="402336" cy="402336"/>
           </a:xfrm>
           <a:prstGeom prst="ellipse">
             <a:avLst/>
@@ -8946,7 +8928,7 @@
           <a:p>
             <a:pPr algn="ctr"/>
             <a:r>
-              <a:rPr sz="1500" b="1">
+              <a:rPr sz="1300" b="1">
                 <a:solidFill>
                   <a:srgbClr val="FFFFFF"/>
                 </a:solidFill>
@@ -8965,8 +8947,8 @@
         </p:nvSpPr>
         <p:spPr>
           <a:xfrm>
-            <a:off x="1554480" y="4553712"/>
-            <a:ext cx="9795967" cy="960120"/>
+            <a:off x="1463040" y="4919472"/>
+            <a:ext cx="4498848" cy="914400"/>
           </a:xfrm>
           <a:prstGeom prst="rect">
             <a:avLst/>
@@ -8980,7 +8962,7 @@
           <a:lstStyle/>
           <a:p>
             <a:r>
-              <a:rPr sz="1500" b="1">
+              <a:rPr sz="1350" b="1">
                 <a:solidFill>
                   <a:srgbClr val="0A0A0A"/>
                 </a:solidFill>
@@ -8992,24 +8974,93 @@
           <a:p>
             <a:pPr>
               <a:lnSpc>
-                <a:spcPct val="128000"/>
+                <a:spcPct val="125000"/>
               </a:lnSpc>
             </a:pPr>
             <a:r>
-              <a:rPr sz="1250" b="0">
+              <a:rPr sz="1100" b="0">
                 <a:solidFill>
                   <a:srgbClr val="52525B"/>
                 </a:solidFill>
                 <a:latin typeface="Calibri"/>
               </a:rPr>
               <a:t>Borra la cuenta. Pide confirmación porque es una acción definitiva.</a:t>
+            </a:r>
+          </a:p>
+        </p:txBody>
+      </p:sp>
+      <p:sp>
+        <p:nvSpPr>
+          <p:cNvPr id="12" name="Rounded Rectangle 11"/>
+          <p:cNvSpPr/>
+          <p:nvPr/>
+        </p:nvSpPr>
+        <p:spPr>
+          <a:xfrm>
+            <a:off x="6419088" y="932688"/>
+            <a:ext cx="4931359" cy="5010912"/>
+          </a:xfrm>
+          <a:prstGeom prst="roundRect">
+            <a:avLst>
+              <a:gd name="adj" fmla="val 4000"/>
+            </a:avLst>
+          </a:prstGeom>
+          <a:solidFill>
+            <a:srgbClr val="F1F1F3"/>
+          </a:solidFill>
+          <a:ln w="12700">
+            <a:solidFill>
+              <a:srgbClr val="A1A1AA"/>
+            </a:solidFill>
+          </a:ln>
+          <a:effectLst/>
+        </p:spPr>
+        <p:style>
+          <a:lnRef idx="1">
+            <a:schemeClr val="accent1"/>
+          </a:lnRef>
+          <a:fillRef idx="3">
+            <a:schemeClr val="accent1"/>
+          </a:fillRef>
+          <a:effectRef idx="2">
+            <a:schemeClr val="accent1"/>
+          </a:effectRef>
+          <a:fontRef idx="minor">
+            <a:schemeClr val="lt1"/>
+          </a:fontRef>
+        </p:style>
+        <p:txBody>
+          <a:bodyPr rtlCol="0" anchor="ctr" wrap="square"/>
+          <a:lstStyle/>
+          <a:p>
+            <a:pPr algn="ctr"/>
+            <a:r>
+              <a:rPr sz="1200" b="1" spc="120">
+                <a:solidFill>
+                  <a:srgbClr val="71717A"/>
+                </a:solidFill>
+                <a:latin typeface="Calibri"/>
+              </a:rPr>
+              <a:t>CAPTURA PENDIENTE</a:t>
+            </a:r>
+          </a:p>
+          <a:p>
+            <a:pPr algn="ctr"/>
+            <a:r>
+              <a:rPr sz="1050" b="0">
+                <a:solidFill>
+                  <a:srgbClr val="A1A1AA"/>
+                </a:solidFill>
+                <a:latin typeface="Calibri"/>
+              </a:rPr>
+              <a:t>Edición de rol y estado</a:t>
             </a:r>
           </a:p>
         </p:txBody>
       </p:sp>
       <p:pic>
         <p:nvPicPr>
-          <p:cNvPr id="12" name="Picture 11" descr="renew-wordmark-black.png"/>
+          <p:cNvPr id="13" name="Picture 12" descr="renew-wordmark-black.png"/>
           <p:cNvPicPr>
             <a:picLocks noChangeAspect="1"/>
           </p:cNvPicPr>
@@ -9033,7 +9084,7 @@
       </p:pic>
       <p:sp>
         <p:nvSpPr>
-          <p:cNvPr id="13" name="TextBox 12"/>
+          <p:cNvPr id="14" name="TextBox 13"/>
           <p:cNvSpPr txBox="1"/>
           <p:nvPr/>
         </p:nvSpPr>

--- a/docs/onboarding/pptx/02-admin.pptx
+++ b/docs/onboarding/pptx/02-admin.pptx
@@ -3315,7 +3315,7 @@
                 </a:solidFill>
                 <a:latin typeface="Calibri"/>
               </a:rPr>
-              <a:t>    Santa Rosa Automotores · Paraguay</a:t>
+              <a:t>    Santa Rosa Paraguay SA · Paraguay</a:t>
             </a:r>
           </a:p>
         </p:txBody>
@@ -5760,7 +5760,7 @@
                 </a:solidFill>
                 <a:latin typeface="Calibri"/>
               </a:rPr>
-              <a:t>Renew Subastas · Santa Rosa Automotores</a:t>
+              <a:t>Renew Subastas · Santa Rosa Paraguay SA</a:t>
             </a:r>
           </a:p>
         </p:txBody>
